--- a/dist/초4/영어/표현과문화/초4_영어_표현과문화_01_사물묘사하기.pptx
+++ b/dist/초4/영어/표현과문화/초4_영어_표현과문화_01_사물묘사하기.pptx
@@ -120,20 +120,20 @@
   <p:extLst>
     <p:ext uri="{521415D9-36F7-43E2-AB2F-B90AF26B5E84}">
       <p14:sectionLst xmlns:p14="http://schemas.microsoft.com/office/powerpoint/2010/main">
-        <p14:section name="도입" id="{eedafef9-91d4-eedf-3abe-47cdf938fd7f}">
+        <p14:section name="도입" id="{5472bcbb-76f1-e08e-ba2f-401bac4baaad}">
           <p14:sldIdLst>
             <p14:sldId id="256"/>
             <p14:sldId id="257"/>
           </p14:sldIdLst>
         </p14:section>
-        <p14:section name="개념" id="{62418f30-0b22-665f-b13b-0b8e109fa751}">
+        <p14:section name="개념" id="{dc4d29f7-27ed-1696-953c-807c26d6e042}">
           <p14:sldIdLst>
             <p14:sldId id="258"/>
             <p14:sldId id="259"/>
             <p14:sldId id="260"/>
           </p14:sldIdLst>
         </p14:section>
-        <p14:section name="연습" id="{68cc5c84-35d2-24fe-e8f0-b435a49a3255}">
+        <p14:section name="연습" id="{c4986ea2-beff-5f0a-57cf-4b50e88156a5}">
           <p14:sldIdLst>
             <p14:sldId id="261"/>
             <p14:sldId id="262"/>
@@ -141,19 +141,19 @@
             <p14:sldId id="264"/>
           </p14:sldIdLst>
         </p14:section>
-        <p14:section name="확인" id="{8d5e921e-1ad9-3510-9f94-31a5a8e0c107}">
+        <p14:section name="확인" id="{7a09a345-6649-8815-e665-4a74097829b7}">
           <p14:sldIdLst>
             <p14:sldId id="265"/>
             <p14:sldId id="266"/>
             <p14:sldId id="267"/>
           </p14:sldIdLst>
         </p14:section>
-        <p14:section name="정리" id="{54f9b034-f8a8-7706-7aa5-6ebc24f2a7cc}">
+        <p14:section name="정리" id="{bcfd5943-9b67-d403-7b88-fa6c7cf00135}">
           <p14:sldIdLst>
             <p14:sldId id="268"/>
           </p14:sldIdLst>
         </p14:section>
-        <p14:section name="보충" id="{71636dd0-e264-a6f4-38d7-a7d19cae2610}">
+        <p14:section name="보충" id="{d4c512ba-e9e9-65a7-f788-3f83074153a8}">
           <p14:sldIdLst>
             <p14:sldId id="269"/>
           </p14:sldIdLst>

--- a/dist/초4/영어/표현과문화/초4_영어_표현과문화_01_사물묘사하기.pptx
+++ b/dist/초4/영어/표현과문화/초4_영어_표현과문화_01_사물묘사하기.pptx
@@ -120,20 +120,20 @@
   <p:extLst>
     <p:ext uri="{521415D9-36F7-43E2-AB2F-B90AF26B5E84}">
       <p14:sectionLst xmlns:p14="http://schemas.microsoft.com/office/powerpoint/2010/main">
-        <p14:section name="도입" id="{5472bcbb-76f1-e08e-ba2f-401bac4baaad}">
+        <p14:section name="도입" id="{cdf16504-1ca4-f4c3-8852-cf1169edc682}">
           <p14:sldIdLst>
             <p14:sldId id="256"/>
             <p14:sldId id="257"/>
           </p14:sldIdLst>
         </p14:section>
-        <p14:section name="개념" id="{dc4d29f7-27ed-1696-953c-807c26d6e042}">
+        <p14:section name="개념" id="{f6c6e15c-dbf5-e289-153d-6243a586ae83}">
           <p14:sldIdLst>
             <p14:sldId id="258"/>
             <p14:sldId id="259"/>
             <p14:sldId id="260"/>
           </p14:sldIdLst>
         </p14:section>
-        <p14:section name="연습" id="{c4986ea2-beff-5f0a-57cf-4b50e88156a5}">
+        <p14:section name="연습" id="{c63bbd39-9df9-45c9-4418-ec32f8d9600b}">
           <p14:sldIdLst>
             <p14:sldId id="261"/>
             <p14:sldId id="262"/>
@@ -141,19 +141,19 @@
             <p14:sldId id="264"/>
           </p14:sldIdLst>
         </p14:section>
-        <p14:section name="확인" id="{7a09a345-6649-8815-e665-4a74097829b7}">
+        <p14:section name="확인" id="{c5641d41-d5e5-4c3b-ef77-00947d5073b7}">
           <p14:sldIdLst>
             <p14:sldId id="265"/>
             <p14:sldId id="266"/>
             <p14:sldId id="267"/>
           </p14:sldIdLst>
         </p14:section>
-        <p14:section name="정리" id="{bcfd5943-9b67-d403-7b88-fa6c7cf00135}">
+        <p14:section name="정리" id="{c8305530-fe7a-1fe5-b917-3315b3daebe3}">
           <p14:sldIdLst>
             <p14:sldId id="268"/>
           </p14:sldIdLst>
         </p14:section>
-        <p14:section name="보충" id="{d4c512ba-e9e9-65a7-f788-3f83074153a8}">
+        <p14:section name="보충" id="{f77804a1-14fa-346d-a32c-51c55de8c499}">
           <p14:sldIdLst>
             <p14:sldId id="269"/>
           </p14:sldIdLst>
@@ -1068,7 +1068,7 @@
 막히면
 - 색깔 낱말 카드를 같은 색 물건 옆에 놓고 함께 읽습니다.
 주의
-- 이 차시는 계획상 바로 앞 차시가 없습니다. 보충 뒤에도 색깔 낱말을 읽지 못하면 3학년 ‘그림 보고 낱말 읽기’(KR22-G03-ENG-PICWORDS-L01)를, It's로 대답하지 못하면 ‘시각 묻고 답하기’(KR22-G04-ENG-WHATTIME-L01)를 먼저 다시 하고 이 차시를 시작합니다.</a:t>
+- 보충 뒤에도 색깔 낱말을 읽지 못하면 3학년 ‘그림 보고 낱말 읽기’(KR22-G03-ENG-PICWORDS-L01)를, It's로 대답하지 못하면 ‘시각 묻고 답하기’(KR22-G04-ENG-WHATTIME-L01)를 먼저 다시 하고 이 차시를 시작합니다.</a:t>
             </a:r>
             <a:endParaRPr lang="en-US" dirty="0"/>
           </a:p>
@@ -1157,7 +1157,7 @@
             <a:r>
               <a:rPr lang="en-US" dirty="0"/>
               <a:t>[S02 · 선수 학습 확인(색깔 낱말, It's ~.)]
-목적: 3학년 ‘그림 보고 낱말 읽기’의 색깔 낱말과, 지난 차시(시각 묻고 답하기)처럼 It's로 시작하는 대답을 기억하는지 확인합니다. 이 차시는 계획상 바로 앞 차시가 없지만, 오늘 문장이 모두 It's로 시작하고 색깔 낱말을 쓰므로 꼭 필요합니다.
+목적: 3학년 ‘그림 보고 낱말 읽기’의 색깔 낱말과, 지난 차시(시각 묻고 답하기)처럼 It's로 시작하는 대답을 기억하는지 확인합니다. 오늘 문장이 모두 It's로 시작하고 색깔 낱말을 쓰므로 꼭 필요합니다.
 시간: 약 3분
 이렇게 말해 보세요
 - “①의 낱말을 하나씩 읽고 무슨 색인지 말해 줄래? 그 색 물건을 가리켜도 돼.”
